--- a/docs/poster/variants/v25.pptx
+++ b/docs/poster/variants/v25.pptx
@@ -3613,6 +3613,90 @@
               </a:spcAft>
             </a:pPr>
             <a:r>
+              <a:rPr sz="6200" b="1">
+                <a:solidFill>
+                  <a:srgbClr val="B5502A"/>
+                </a:solidFill>
+                <a:latin typeface="Times New Roman"/>
+              </a:rPr>
+              <a:t>1,389</a:t>
+            </a:r>
+          </a:p>
+        </p:txBody>
+      </p:sp>
+      <p:sp>
+        <p:nvSpPr>
+          <p:cNvPr id="15" name="TextBox 14"/>
+          <p:cNvSpPr txBox="1"/>
+          <p:nvPr/>
+        </p:nvSpPr>
+        <p:spPr>
+          <a:xfrm>
+            <a:off x="731520" y="14238223"/>
+            <a:ext cx="10607040" cy="365760"/>
+          </a:xfrm>
+          <a:prstGeom prst="rect">
+            <a:avLst/>
+          </a:prstGeom>
+          <a:noFill/>
+        </p:spPr>
+        <p:txBody>
+          <a:bodyPr wrap="square" lIns="0" rIns="0" tIns="0" bIns="0">
+            <a:spAutoFit/>
+          </a:bodyPr>
+          <a:lstStyle/>
+          <a:p>
+            <a:pPr algn="l">
+              <a:lnSpc>
+                <a:spcPct val="122000"/>
+              </a:lnSpc>
+              <a:spcAft>
+                <a:spcPts val="600"/>
+              </a:spcAft>
+            </a:pPr>
+            <a:r>
+              <a:rPr sz="1600" b="0">
+                <a:solidFill>
+                  <a:srgbClr val="5B5B5B"/>
+                </a:solidFill>
+                <a:latin typeface="Arial"/>
+              </a:rPr>
+              <a:t>joystick commands through the platform</a:t>
+            </a:r>
+          </a:p>
+        </p:txBody>
+      </p:sp>
+      <p:sp>
+        <p:nvSpPr>
+          <p:cNvPr id="16" name="TextBox 15"/>
+          <p:cNvSpPr txBox="1"/>
+          <p:nvPr/>
+        </p:nvSpPr>
+        <p:spPr>
+          <a:xfrm>
+            <a:off x="731520" y="14708632"/>
+            <a:ext cx="10607040" cy="365760"/>
+          </a:xfrm>
+          <a:prstGeom prst="rect">
+            <a:avLst/>
+          </a:prstGeom>
+          <a:noFill/>
+        </p:spPr>
+        <p:txBody>
+          <a:bodyPr wrap="square" lIns="0" rIns="0" tIns="0" bIns="0">
+            <a:spAutoFit/>
+          </a:bodyPr>
+          <a:lstStyle/>
+          <a:p>
+            <a:pPr algn="l">
+              <a:lnSpc>
+                <a:spcPct val="95000"/>
+              </a:lnSpc>
+              <a:spcAft>
+                <a:spcPts val="0"/>
+              </a:spcAft>
+            </a:pPr>
+            <a:r>
               <a:rPr sz="3400" b="1">
                 <a:solidFill>
                   <a:srgbClr val="FFFFFF"/>
@@ -3626,13 +3710,13 @@
       </p:sp>
       <p:sp>
         <p:nvSpPr>
-          <p:cNvPr id="15" name="Rectangle 14"/>
+          <p:cNvPr id="17" name="Rectangle 16"/>
           <p:cNvSpPr/>
           <p:nvPr/>
         </p:nvSpPr>
         <p:spPr>
           <a:xfrm>
-            <a:off x="731520" y="13996415"/>
+            <a:off x="731520" y="15269972"/>
             <a:ext cx="10607040" cy="27432"/>
           </a:xfrm>
           <a:prstGeom prst="rect">
@@ -3670,13 +3754,13 @@
       </p:sp>
       <p:sp>
         <p:nvSpPr>
-          <p:cNvPr id="16" name="TextBox 15"/>
+          <p:cNvPr id="18" name="TextBox 17"/>
           <p:cNvSpPr txBox="1"/>
           <p:nvPr/>
         </p:nvSpPr>
         <p:spPr>
           <a:xfrm>
-            <a:off x="731520" y="14325599"/>
+            <a:off x="731520" y="15599156"/>
             <a:ext cx="10607040" cy="365760"/>
           </a:xfrm>
           <a:prstGeom prst="rect">
@@ -3712,13 +3796,13 @@
       </p:sp>
       <p:sp>
         <p:nvSpPr>
-          <p:cNvPr id="17" name="TextBox 16"/>
+          <p:cNvPr id="19" name="TextBox 18"/>
           <p:cNvSpPr txBox="1"/>
           <p:nvPr/>
         </p:nvSpPr>
         <p:spPr>
           <a:xfrm>
-            <a:off x="731520" y="16436848"/>
+            <a:off x="731520" y="17710404"/>
             <a:ext cx="10607040" cy="365760"/>
           </a:xfrm>
           <a:prstGeom prst="rect">
@@ -3754,13 +3838,13 @@
       </p:sp>
       <p:sp>
         <p:nvSpPr>
-          <p:cNvPr id="18" name="Rectangle 17"/>
+          <p:cNvPr id="20" name="Rectangle 19"/>
           <p:cNvSpPr/>
           <p:nvPr/>
         </p:nvSpPr>
         <p:spPr>
           <a:xfrm>
-            <a:off x="731520" y="16998188"/>
+            <a:off x="731520" y="18271744"/>
             <a:ext cx="10607040" cy="27432"/>
           </a:xfrm>
           <a:prstGeom prst="rect">
@@ -3798,7 +3882,7 @@
       </p:sp>
       <p:pic>
         <p:nvPicPr>
-          <p:cNvPr id="19" name="Picture 18" descr="l_robots.png"/>
+          <p:cNvPr id="21" name="Picture 20" descr="l_robots.png"/>
           <p:cNvPicPr>
             <a:picLocks noChangeAspect="1"/>
           </p:cNvPicPr>
@@ -3812,7 +3896,7 @@
         </p:blipFill>
         <p:spPr>
           <a:xfrm>
-            <a:off x="731520" y="17327372"/>
+            <a:off x="731520" y="18600928"/>
             <a:ext cx="10607040" cy="2377440"/>
           </a:xfrm>
           <a:prstGeom prst="rect">
@@ -3822,13 +3906,13 @@
       </p:pic>
       <p:sp>
         <p:nvSpPr>
-          <p:cNvPr id="20" name="TextBox 19"/>
+          <p:cNvPr id="22" name="TextBox 21"/>
           <p:cNvSpPr txBox="1"/>
           <p:nvPr/>
         </p:nvSpPr>
         <p:spPr>
           <a:xfrm>
-            <a:off x="731520" y="19814540"/>
+            <a:off x="731520" y="21088096"/>
             <a:ext cx="10607040" cy="365760"/>
           </a:xfrm>
           <a:prstGeom prst="rect">
@@ -3864,13 +3948,13 @@
       </p:sp>
       <p:sp>
         <p:nvSpPr>
-          <p:cNvPr id="21" name="TextBox 20"/>
+          <p:cNvPr id="23" name="TextBox 22"/>
           <p:cNvSpPr txBox="1"/>
           <p:nvPr/>
         </p:nvSpPr>
         <p:spPr>
           <a:xfrm>
-            <a:off x="731520" y="21084540"/>
+            <a:off x="731520" y="22358096"/>
             <a:ext cx="10607040" cy="365760"/>
           </a:xfrm>
           <a:prstGeom prst="rect">
@@ -3906,13 +3990,13 @@
       </p:sp>
       <p:sp>
         <p:nvSpPr>
-          <p:cNvPr id="22" name="TextBox 21"/>
+          <p:cNvPr id="24" name="TextBox 23"/>
           <p:cNvSpPr txBox="1"/>
           <p:nvPr/>
         </p:nvSpPr>
         <p:spPr>
           <a:xfrm>
-            <a:off x="731520" y="22576028"/>
+            <a:off x="731520" y="23849584"/>
             <a:ext cx="10607040" cy="365760"/>
           </a:xfrm>
           <a:prstGeom prst="rect">
@@ -3948,13 +4032,13 @@
       </p:sp>
       <p:sp>
         <p:nvSpPr>
-          <p:cNvPr id="23" name="Rectangle 22"/>
+          <p:cNvPr id="25" name="Rectangle 24"/>
           <p:cNvSpPr/>
           <p:nvPr/>
         </p:nvSpPr>
         <p:spPr>
           <a:xfrm>
-            <a:off x="731520" y="23137368"/>
+            <a:off x="731520" y="24410924"/>
             <a:ext cx="10607040" cy="27432"/>
           </a:xfrm>
           <a:prstGeom prst="rect">
@@ -3992,13 +4076,13 @@
       </p:sp>
       <p:sp>
         <p:nvSpPr>
-          <p:cNvPr id="24" name="TextBox 23"/>
+          <p:cNvPr id="26" name="TextBox 25"/>
           <p:cNvSpPr txBox="1"/>
           <p:nvPr/>
         </p:nvSpPr>
         <p:spPr>
           <a:xfrm>
-            <a:off x="731520" y="23466552"/>
+            <a:off x="731520" y="24740108"/>
             <a:ext cx="10607040" cy="365760"/>
           </a:xfrm>
           <a:prstGeom prst="rect">
@@ -4034,13 +4118,13 @@
       </p:sp>
       <p:sp>
         <p:nvSpPr>
-          <p:cNvPr id="25" name="TextBox 24"/>
+          <p:cNvPr id="27" name="TextBox 26"/>
           <p:cNvSpPr txBox="1"/>
           <p:nvPr/>
         </p:nvSpPr>
         <p:spPr>
           <a:xfrm>
-            <a:off x="731520" y="25267920"/>
+            <a:off x="731520" y="26541476"/>
             <a:ext cx="10607040" cy="365760"/>
           </a:xfrm>
           <a:prstGeom prst="rect">
@@ -4076,13 +4160,13 @@
       </p:sp>
       <p:sp>
         <p:nvSpPr>
-          <p:cNvPr id="26" name="Rectangle 25"/>
+          <p:cNvPr id="28" name="Rectangle 27"/>
           <p:cNvSpPr/>
           <p:nvPr/>
         </p:nvSpPr>
         <p:spPr>
           <a:xfrm>
-            <a:off x="731520" y="25829260"/>
+            <a:off x="731520" y="27102816"/>
             <a:ext cx="10607040" cy="27432"/>
           </a:xfrm>
           <a:prstGeom prst="rect">
@@ -4120,13 +4204,13 @@
       </p:sp>
       <p:sp>
         <p:nvSpPr>
-          <p:cNvPr id="27" name="TextBox 26"/>
+          <p:cNvPr id="29" name="TextBox 28"/>
           <p:cNvSpPr txBox="1"/>
           <p:nvPr/>
         </p:nvSpPr>
         <p:spPr>
           <a:xfrm>
-            <a:off x="731520" y="26158444"/>
+            <a:off x="731520" y="27432000"/>
             <a:ext cx="10607040" cy="365760"/>
           </a:xfrm>
           <a:prstGeom prst="rect">
@@ -4162,7 +4246,7 @@
       </p:sp>
       <p:sp>
         <p:nvSpPr>
-          <p:cNvPr id="28" name="TextBox 27"/>
+          <p:cNvPr id="30" name="TextBox 29"/>
           <p:cNvSpPr txBox="1"/>
           <p:nvPr/>
         </p:nvSpPr>
@@ -4204,7 +4288,7 @@
       </p:sp>
       <p:sp>
         <p:nvSpPr>
-          <p:cNvPr id="29" name="Rectangle 28"/>
+          <p:cNvPr id="31" name="Rectangle 30"/>
           <p:cNvSpPr/>
           <p:nvPr/>
         </p:nvSpPr>
@@ -4248,7 +4332,7 @@
       </p:sp>
       <p:sp>
         <p:nvSpPr>
-          <p:cNvPr id="30" name="TextBox 29"/>
+          <p:cNvPr id="32" name="TextBox 31"/>
           <p:cNvSpPr txBox="1"/>
           <p:nvPr/>
         </p:nvSpPr>
@@ -4283,14 +4367,14 @@
                 </a:solidFill>
                 <a:latin typeface="Arial"/>
               </a:rPr>
-              <a:t>Robot 241 is a tracked rover that drives crop rows and streams camera, GPS and two IMUs. The laser cart carries the weeder: a galvanometer laser, a down camera over the work zone and a forward camera. A Unitree humanoid has a project and has uploaded nothing yet. Between them the two ground vehicles have recorded 2,686 frames in 26 drives.</a:t>
-            </a:r>
-          </a:p>
-        </p:txBody>
-      </p:sp>
-      <p:sp>
-        <p:nvSpPr>
-          <p:cNvPr id="31" name="TextBox 30"/>
+              <a:t>Robot 241 is a tracked rover that drives crop rows and streams camera, GPS and two IMUs. The laser cart carries the weeder: a galvanometer laser, a down camera over the work zone and a forward camera. Ten projects sit on the platform and two of them have a robot reporting into them. Between those two vehicles, 2,686 frames in 26 drives.</a:t>
+            </a:r>
+          </a:p>
+        </p:txBody>
+      </p:sp>
+      <p:sp>
+        <p:nvSpPr>
+          <p:cNvPr id="33" name="TextBox 32"/>
           <p:cNvSpPr txBox="1"/>
           <p:nvPr/>
         </p:nvSpPr>
@@ -4319,6 +4403,90 @@
               </a:spcAft>
             </a:pPr>
             <a:r>
+              <a:rPr sz="6200" b="1">
+                <a:solidFill>
+                  <a:srgbClr val="B5502A"/>
+                </a:solidFill>
+                <a:latin typeface="Times New Roman"/>
+              </a:rPr>
+              <a:t>14</a:t>
+            </a:r>
+          </a:p>
+        </p:txBody>
+      </p:sp>
+      <p:sp>
+        <p:nvSpPr>
+          <p:cNvPr id="34" name="TextBox 33"/>
+          <p:cNvSpPr txBox="1"/>
+          <p:nvPr/>
+        </p:nvSpPr>
+        <p:spPr>
+          <a:xfrm>
+            <a:off x="11704320" y="14238223"/>
+            <a:ext cx="10607040" cy="365760"/>
+          </a:xfrm>
+          <a:prstGeom prst="rect">
+            <a:avLst/>
+          </a:prstGeom>
+          <a:noFill/>
+        </p:spPr>
+        <p:txBody>
+          <a:bodyPr wrap="square" lIns="0" rIns="0" tIns="0" bIns="0">
+            <a:spAutoFit/>
+          </a:bodyPr>
+          <a:lstStyle/>
+          <a:p>
+            <a:pPr algn="l">
+              <a:lnSpc>
+                <a:spcPct val="122000"/>
+              </a:lnSpc>
+              <a:spcAft>
+                <a:spcPts val="600"/>
+              </a:spcAft>
+            </a:pPr>
+            <a:r>
+              <a:rPr sz="1600" b="0">
+                <a:solidFill>
+                  <a:srgbClr val="5B5B5B"/>
+                </a:solidFill>
+                <a:latin typeface="Arial"/>
+              </a:rPr>
+              <a:t>analysis tools the planner can choose from</a:t>
+            </a:r>
+          </a:p>
+        </p:txBody>
+      </p:sp>
+      <p:sp>
+        <p:nvSpPr>
+          <p:cNvPr id="35" name="TextBox 34"/>
+          <p:cNvSpPr txBox="1"/>
+          <p:nvPr/>
+        </p:nvSpPr>
+        <p:spPr>
+          <a:xfrm>
+            <a:off x="11704320" y="14708632"/>
+            <a:ext cx="10607040" cy="365760"/>
+          </a:xfrm>
+          <a:prstGeom prst="rect">
+            <a:avLst/>
+          </a:prstGeom>
+          <a:noFill/>
+        </p:spPr>
+        <p:txBody>
+          <a:bodyPr wrap="square" lIns="0" rIns="0" tIns="0" bIns="0">
+            <a:spAutoFit/>
+          </a:bodyPr>
+          <a:lstStyle/>
+          <a:p>
+            <a:pPr algn="l">
+              <a:lnSpc>
+                <a:spcPct val="95000"/>
+              </a:lnSpc>
+              <a:spcAft>
+                <a:spcPts val="0"/>
+              </a:spcAft>
+            </a:pPr>
+            <a:r>
               <a:rPr sz="3400" b="1">
                 <a:solidFill>
                   <a:srgbClr val="FFFFFF"/>
@@ -4332,13 +4500,13 @@
       </p:sp>
       <p:sp>
         <p:nvSpPr>
-          <p:cNvPr id="32" name="Rectangle 31"/>
+          <p:cNvPr id="36" name="Rectangle 35"/>
           <p:cNvSpPr/>
           <p:nvPr/>
         </p:nvSpPr>
         <p:spPr>
           <a:xfrm>
-            <a:off x="11704320" y="13996415"/>
+            <a:off x="11704320" y="15269972"/>
             <a:ext cx="10607040" cy="27432"/>
           </a:xfrm>
           <a:prstGeom prst="rect">
@@ -4376,13 +4544,13 @@
       </p:sp>
       <p:sp>
         <p:nvSpPr>
-          <p:cNvPr id="33" name="TextBox 32"/>
+          <p:cNvPr id="37" name="TextBox 36"/>
           <p:cNvSpPr txBox="1"/>
           <p:nvPr/>
         </p:nvSpPr>
         <p:spPr>
           <a:xfrm>
-            <a:off x="11704320" y="14325599"/>
+            <a:off x="11704320" y="15599156"/>
             <a:ext cx="10607040" cy="365760"/>
           </a:xfrm>
           <a:prstGeom prst="rect">
@@ -4418,13 +4586,13 @@
       </p:sp>
       <p:sp>
         <p:nvSpPr>
-          <p:cNvPr id="34" name="TextBox 33"/>
+          <p:cNvPr id="38" name="TextBox 37"/>
           <p:cNvSpPr txBox="1"/>
           <p:nvPr/>
         </p:nvSpPr>
         <p:spPr>
           <a:xfrm>
-            <a:off x="11704320" y="16126968"/>
+            <a:off x="11704320" y="17400524"/>
             <a:ext cx="10607040" cy="365760"/>
           </a:xfrm>
           <a:prstGeom prst="rect">
@@ -4460,13 +4628,13 @@
       </p:sp>
       <p:sp>
         <p:nvSpPr>
-          <p:cNvPr id="35" name="Rectangle 34"/>
+          <p:cNvPr id="39" name="Rectangle 38"/>
           <p:cNvSpPr/>
           <p:nvPr/>
         </p:nvSpPr>
         <p:spPr>
           <a:xfrm>
-            <a:off x="11704320" y="16688308"/>
+            <a:off x="11704320" y="17961864"/>
             <a:ext cx="10607040" cy="27432"/>
           </a:xfrm>
           <a:prstGeom prst="rect">
@@ -4504,13 +4672,13 @@
       </p:sp>
       <p:sp>
         <p:nvSpPr>
-          <p:cNvPr id="36" name="TextBox 35"/>
+          <p:cNvPr id="40" name="TextBox 39"/>
           <p:cNvSpPr txBox="1"/>
           <p:nvPr/>
         </p:nvSpPr>
         <p:spPr>
           <a:xfrm>
-            <a:off x="11704320" y="17017492"/>
+            <a:off x="11704320" y="18291048"/>
             <a:ext cx="10607040" cy="365760"/>
           </a:xfrm>
           <a:prstGeom prst="rect">
@@ -4546,13 +4714,13 @@
       </p:sp>
       <p:sp>
         <p:nvSpPr>
-          <p:cNvPr id="37" name="TextBox 36"/>
+          <p:cNvPr id="41" name="TextBox 40"/>
           <p:cNvSpPr txBox="1"/>
           <p:nvPr/>
         </p:nvSpPr>
         <p:spPr>
           <a:xfrm>
-            <a:off x="11704320" y="18508980"/>
+            <a:off x="11704320" y="19782536"/>
             <a:ext cx="10607040" cy="365760"/>
           </a:xfrm>
           <a:prstGeom prst="rect">
@@ -4575,6 +4743,90 @@
               </a:spcAft>
             </a:pPr>
             <a:r>
+              <a:rPr sz="6200" b="1">
+                <a:solidFill>
+                  <a:srgbClr val="B5502A"/>
+                </a:solidFill>
+                <a:latin typeface="Times New Roman"/>
+              </a:rPr>
+              <a:t>92</a:t>
+            </a:r>
+          </a:p>
+        </p:txBody>
+      </p:sp>
+      <p:sp>
+        <p:nvSpPr>
+          <p:cNvPr id="42" name="TextBox 41"/>
+          <p:cNvSpPr txBox="1"/>
+          <p:nvPr/>
+        </p:nvSpPr>
+        <p:spPr>
+          <a:xfrm>
+            <a:off x="11704320" y="20585684"/>
+            <a:ext cx="10607040" cy="365760"/>
+          </a:xfrm>
+          <a:prstGeom prst="rect">
+            <a:avLst/>
+          </a:prstGeom>
+          <a:noFill/>
+        </p:spPr>
+        <p:txBody>
+          <a:bodyPr wrap="square" lIns="0" rIns="0" tIns="0" bIns="0">
+            <a:spAutoFit/>
+          </a:bodyPr>
+          <a:lstStyle/>
+          <a:p>
+            <a:pPr algn="l">
+              <a:lnSpc>
+                <a:spcPct val="122000"/>
+              </a:lnSpc>
+              <a:spcAft>
+                <a:spcPts val="600"/>
+              </a:spcAft>
+            </a:pPr>
+            <a:r>
+              <a:rPr sz="1600" b="0">
+                <a:solidFill>
+                  <a:srgbClr val="5B5B5B"/>
+                </a:solidFill>
+                <a:latin typeface="Arial"/>
+              </a:rPr>
+              <a:t>questions asked of a dataset so far</a:t>
+            </a:r>
+          </a:p>
+        </p:txBody>
+      </p:sp>
+      <p:sp>
+        <p:nvSpPr>
+          <p:cNvPr id="43" name="TextBox 42"/>
+          <p:cNvSpPr txBox="1"/>
+          <p:nvPr/>
+        </p:nvSpPr>
+        <p:spPr>
+          <a:xfrm>
+            <a:off x="11704320" y="21056092"/>
+            <a:ext cx="10607040" cy="365760"/>
+          </a:xfrm>
+          <a:prstGeom prst="rect">
+            <a:avLst/>
+          </a:prstGeom>
+          <a:noFill/>
+        </p:spPr>
+        <p:txBody>
+          <a:bodyPr wrap="square" lIns="0" rIns="0" tIns="0" bIns="0">
+            <a:spAutoFit/>
+          </a:bodyPr>
+          <a:lstStyle/>
+          <a:p>
+            <a:pPr algn="l">
+              <a:lnSpc>
+                <a:spcPct val="95000"/>
+              </a:lnSpc>
+              <a:spcAft>
+                <a:spcPts val="0"/>
+              </a:spcAft>
+            </a:pPr>
+            <a:r>
               <a:rPr sz="3400" b="1">
                 <a:solidFill>
                   <a:srgbClr val="FFFFFF"/>
@@ -4588,13 +4840,13 @@
       </p:sp>
       <p:sp>
         <p:nvSpPr>
-          <p:cNvPr id="38" name="Rectangle 37"/>
+          <p:cNvPr id="44" name="Rectangle 43"/>
           <p:cNvSpPr/>
           <p:nvPr/>
         </p:nvSpPr>
         <p:spPr>
           <a:xfrm>
-            <a:off x="11704320" y="19070320"/>
+            <a:off x="11704320" y="21617432"/>
             <a:ext cx="10607040" cy="27432"/>
           </a:xfrm>
           <a:prstGeom prst="rect">
@@ -4632,13 +4884,13 @@
       </p:sp>
       <p:sp>
         <p:nvSpPr>
-          <p:cNvPr id="39" name="TextBox 38"/>
+          <p:cNvPr id="45" name="TextBox 44"/>
           <p:cNvSpPr txBox="1"/>
           <p:nvPr/>
         </p:nvSpPr>
         <p:spPr>
           <a:xfrm>
-            <a:off x="11704320" y="19399504"/>
+            <a:off x="11704320" y="21946616"/>
             <a:ext cx="10607040" cy="365760"/>
           </a:xfrm>
           <a:prstGeom prst="rect">
@@ -4674,13 +4926,13 @@
       </p:sp>
       <p:sp>
         <p:nvSpPr>
-          <p:cNvPr id="40" name="TextBox 39"/>
+          <p:cNvPr id="46" name="TextBox 45"/>
           <p:cNvSpPr txBox="1"/>
           <p:nvPr/>
         </p:nvSpPr>
         <p:spPr>
           <a:xfrm>
-            <a:off x="11704320" y="21200872"/>
+            <a:off x="11704320" y="23747984"/>
             <a:ext cx="10607040" cy="365760"/>
           </a:xfrm>
           <a:prstGeom prst="rect">
@@ -4716,13 +4968,13 @@
       </p:sp>
       <p:sp>
         <p:nvSpPr>
-          <p:cNvPr id="41" name="Rectangle 40"/>
+          <p:cNvPr id="47" name="Rectangle 46"/>
           <p:cNvSpPr/>
           <p:nvPr/>
         </p:nvSpPr>
         <p:spPr>
           <a:xfrm>
-            <a:off x="11704320" y="21762212"/>
+            <a:off x="11704320" y="24309324"/>
             <a:ext cx="10607040" cy="27432"/>
           </a:xfrm>
           <a:prstGeom prst="rect">
@@ -4760,13 +5012,13 @@
       </p:sp>
       <p:sp>
         <p:nvSpPr>
-          <p:cNvPr id="42" name="TextBox 41"/>
+          <p:cNvPr id="48" name="TextBox 47"/>
           <p:cNvSpPr txBox="1"/>
           <p:nvPr/>
         </p:nvSpPr>
         <p:spPr>
           <a:xfrm>
-            <a:off x="11704320" y="22091396"/>
+            <a:off x="11704320" y="24638508"/>
             <a:ext cx="10607040" cy="365760"/>
           </a:xfrm>
           <a:prstGeom prst="rect">
@@ -4802,7 +5054,7 @@
       </p:sp>
       <p:sp>
         <p:nvSpPr>
-          <p:cNvPr id="43" name="TextBox 42"/>
+          <p:cNvPr id="49" name="TextBox 48"/>
           <p:cNvSpPr txBox="1"/>
           <p:nvPr/>
         </p:nvSpPr>
@@ -4844,7 +5096,7 @@
       </p:sp>
       <p:sp>
         <p:nvSpPr>
-          <p:cNvPr id="44" name="Rectangle 43"/>
+          <p:cNvPr id="50" name="Rectangle 49"/>
           <p:cNvSpPr/>
           <p:nvPr/>
         </p:nvSpPr>
@@ -4888,7 +5140,7 @@
       </p:sp>
       <p:sp>
         <p:nvSpPr>
-          <p:cNvPr id="45" name="TextBox 44"/>
+          <p:cNvPr id="51" name="TextBox 50"/>
           <p:cNvSpPr txBox="1"/>
           <p:nvPr/>
         </p:nvSpPr>
@@ -4930,7 +5182,7 @@
       </p:sp>
       <p:sp>
         <p:nvSpPr>
-          <p:cNvPr id="46" name="TextBox 45"/>
+          <p:cNvPr id="52" name="TextBox 51"/>
           <p:cNvSpPr txBox="1"/>
           <p:nvPr/>
         </p:nvSpPr>
@@ -4972,7 +5224,7 @@
       </p:sp>
       <p:sp>
         <p:nvSpPr>
-          <p:cNvPr id="47" name="Rectangle 46"/>
+          <p:cNvPr id="53" name="Rectangle 52"/>
           <p:cNvSpPr/>
           <p:nvPr/>
         </p:nvSpPr>
@@ -5016,7 +5268,7 @@
       </p:sp>
       <p:pic>
         <p:nvPicPr>
-          <p:cNvPr id="48" name="Picture 47" descr="f_rounds.png"/>
+          <p:cNvPr id="54" name="Picture 53" descr="f_rounds.png"/>
           <p:cNvPicPr>
             <a:picLocks noChangeAspect="1"/>
           </p:cNvPicPr>
@@ -5040,7 +5292,7 @@
       </p:pic>
       <p:sp>
         <p:nvSpPr>
-          <p:cNvPr id="49" name="TextBox 48"/>
+          <p:cNvPr id="55" name="TextBox 54"/>
           <p:cNvSpPr txBox="1"/>
           <p:nvPr/>
         </p:nvSpPr>
@@ -5082,7 +5334,7 @@
       </p:sp>
       <p:sp>
         <p:nvSpPr>
-          <p:cNvPr id="50" name="TextBox 49"/>
+          <p:cNvPr id="56" name="TextBox 55"/>
           <p:cNvSpPr txBox="1"/>
           <p:nvPr/>
         </p:nvSpPr>
@@ -5124,7 +5376,7 @@
       </p:sp>
       <p:sp>
         <p:nvSpPr>
-          <p:cNvPr id="51" name="TextBox 50"/>
+          <p:cNvPr id="57" name="TextBox 56"/>
           <p:cNvSpPr txBox="1"/>
           <p:nvPr/>
         </p:nvSpPr>
@@ -5153,6 +5405,90 @@
               </a:spcAft>
             </a:pPr>
             <a:r>
+              <a:rPr sz="6200" b="1">
+                <a:solidFill>
+                  <a:srgbClr val="B5502A"/>
+                </a:solidFill>
+                <a:latin typeface="Times New Roman"/>
+              </a:rPr>
+              <a:t>27</a:t>
+            </a:r>
+          </a:p>
+        </p:txBody>
+      </p:sp>
+      <p:sp>
+        <p:nvSpPr>
+          <p:cNvPr id="58" name="TextBox 57"/>
+          <p:cNvSpPr txBox="1"/>
+          <p:nvPr/>
+        </p:nvSpPr>
+        <p:spPr>
+          <a:xfrm>
+            <a:off x="22677120" y="21493988"/>
+            <a:ext cx="20482560" cy="365760"/>
+          </a:xfrm>
+          <a:prstGeom prst="rect">
+            <a:avLst/>
+          </a:prstGeom>
+          <a:noFill/>
+        </p:spPr>
+        <p:txBody>
+          <a:bodyPr wrap="square" lIns="0" rIns="0" tIns="0" bIns="0">
+            <a:spAutoFit/>
+          </a:bodyPr>
+          <a:lstStyle/>
+          <a:p>
+            <a:pPr algn="l">
+              <a:lnSpc>
+                <a:spcPct val="122000"/>
+              </a:lnSpc>
+              <a:spcAft>
+                <a:spcPts val="600"/>
+              </a:spcAft>
+            </a:pPr>
+            <a:r>
+              <a:rPr sz="1600" b="0">
+                <a:solidFill>
+                  <a:srgbClr val="5B5B5B"/>
+                </a:solidFill>
+                <a:latin typeface="Arial"/>
+              </a:rPr>
+              <a:t>distinct models trained, run, or rejected</a:t>
+            </a:r>
+          </a:p>
+        </p:txBody>
+      </p:sp>
+      <p:sp>
+        <p:nvSpPr>
+          <p:cNvPr id="59" name="TextBox 58"/>
+          <p:cNvSpPr txBox="1"/>
+          <p:nvPr/>
+        </p:nvSpPr>
+        <p:spPr>
+          <a:xfrm>
+            <a:off x="22677120" y="21964395"/>
+            <a:ext cx="20482560" cy="365760"/>
+          </a:xfrm>
+          <a:prstGeom prst="rect">
+            <a:avLst/>
+          </a:prstGeom>
+          <a:noFill/>
+        </p:spPr>
+        <p:txBody>
+          <a:bodyPr wrap="square" lIns="0" rIns="0" tIns="0" bIns="0">
+            <a:spAutoFit/>
+          </a:bodyPr>
+          <a:lstStyle/>
+          <a:p>
+            <a:pPr algn="l">
+              <a:lnSpc>
+                <a:spcPct val="95000"/>
+              </a:lnSpc>
+              <a:spcAft>
+                <a:spcPts val="0"/>
+              </a:spcAft>
+            </a:pPr>
+            <a:r>
               <a:rPr sz="3400" b="1">
                 <a:solidFill>
                   <a:srgbClr val="FFFFFF"/>
@@ -5166,13 +5502,13 @@
       </p:sp>
       <p:sp>
         <p:nvSpPr>
-          <p:cNvPr id="52" name="Rectangle 51"/>
+          <p:cNvPr id="60" name="Rectangle 59"/>
           <p:cNvSpPr/>
           <p:nvPr/>
         </p:nvSpPr>
         <p:spPr>
           <a:xfrm>
-            <a:off x="22677120" y="21252180"/>
+            <a:off x="22677120" y="22525735"/>
             <a:ext cx="20482560" cy="27432"/>
           </a:xfrm>
           <a:prstGeom prst="rect">
@@ -5210,7 +5546,7 @@
       </p:sp>
       <p:pic>
         <p:nvPicPr>
-          <p:cNvPr id="53" name="Picture 52" descr="m_ledger.png"/>
+          <p:cNvPr id="61" name="Picture 60" descr="m_ledger.png"/>
           <p:cNvPicPr>
             <a:picLocks noChangeAspect="1"/>
           </p:cNvPicPr>
@@ -5224,7 +5560,7 @@
         </p:blipFill>
         <p:spPr>
           <a:xfrm>
-            <a:off x="22677120" y="21581364"/>
+            <a:off x="22677120" y="22854919"/>
             <a:ext cx="20482560" cy="3749040"/>
           </a:xfrm>
           <a:prstGeom prst="rect">
@@ -5234,13 +5570,13 @@
       </p:pic>
       <p:sp>
         <p:nvSpPr>
-          <p:cNvPr id="54" name="TextBox 53"/>
+          <p:cNvPr id="62" name="TextBox 61"/>
           <p:cNvSpPr txBox="1"/>
           <p:nvPr/>
         </p:nvSpPr>
         <p:spPr>
           <a:xfrm>
-            <a:off x="22677120" y="25440132"/>
+            <a:off x="22677120" y="26713688"/>
             <a:ext cx="20482560" cy="365760"/>
           </a:xfrm>
           <a:prstGeom prst="rect">
@@ -5276,13 +5612,13 @@
       </p:sp>
       <p:sp>
         <p:nvSpPr>
-          <p:cNvPr id="55" name="TextBox 54"/>
+          <p:cNvPr id="63" name="TextBox 62"/>
           <p:cNvSpPr txBox="1"/>
           <p:nvPr/>
         </p:nvSpPr>
         <p:spPr>
           <a:xfrm>
-            <a:off x="22677120" y="26470356"/>
+            <a:off x="22677120" y="27743911"/>
             <a:ext cx="20482560" cy="365760"/>
           </a:xfrm>
           <a:prstGeom prst="rect">
@@ -5318,7 +5654,7 @@
       </p:sp>
       <p:sp>
         <p:nvSpPr>
-          <p:cNvPr id="56" name="Rectangle 55"/>
+          <p:cNvPr id="64" name="Rectangle 63"/>
           <p:cNvSpPr/>
           <p:nvPr/>
         </p:nvSpPr>
@@ -5362,7 +5698,7 @@
       </p:sp>
       <p:sp>
         <p:nvSpPr>
-          <p:cNvPr id="57" name="TextBox 56"/>
+          <p:cNvPr id="65" name="TextBox 64"/>
           <p:cNvSpPr txBox="1"/>
           <p:nvPr/>
         </p:nvSpPr>
@@ -5404,7 +5740,7 @@
       </p:sp>
       <p:sp>
         <p:nvSpPr>
-          <p:cNvPr id="58" name="TextBox 57"/>
+          <p:cNvPr id="66" name="TextBox 65"/>
           <p:cNvSpPr txBox="1"/>
           <p:nvPr/>
         </p:nvSpPr>
@@ -5446,7 +5782,7 @@
       </p:sp>
       <p:sp>
         <p:nvSpPr>
-          <p:cNvPr id="59" name="TextBox 58"/>
+          <p:cNvPr id="67" name="TextBox 66"/>
           <p:cNvSpPr txBox="1"/>
           <p:nvPr/>
         </p:nvSpPr>
